--- a/docs/Lab/Lab_1_2_Summary.pptx
+++ b/docs/Lab/Lab_1_2_Summary.pptx
@@ -120,6 +120,11 @@
       </a:defRPr>
     </a:lvl9pPr>
   </p:defaultTextStyle>
+  <p:extLst>
+    <p:ext uri="{EFAFB233-063F-42B5-8137-9DF3F51BA10A}">
+      <p15:sldGuideLst xmlns:p15="http://schemas.microsoft.com/office/powerpoint/2012/main"/>
+    </p:ext>
+  </p:extLst>
 </p:presentation>
 </file>
 
@@ -205,7 +210,7 @@
           <a:p>
             <a:fld id="{2C4D7BB3-82EF-4F72-89D3-BF5798D9E9AF}" type="datetimeFigureOut">
               <a:rPr lang="zh-CN" altLang="en-US" smtClean="0"/>
-              <a:t>2025/9/17</a:t>
+              <a:t>2025/9/18</a:t>
             </a:fld>
             <a:endParaRPr lang="zh-CN" altLang="en-US"/>
           </a:p>
@@ -855,7 +860,7 @@
           <a:p>
             <a:fld id="{8264CF15-8E02-4BE3-8BED-2B7E53A4CE09}" type="datetimeFigureOut">
               <a:rPr lang="zh-CN" altLang="en-US" smtClean="0"/>
-              <a:t>2025/9/17</a:t>
+              <a:t>2025/9/18</a:t>
             </a:fld>
             <a:endParaRPr lang="zh-CN" altLang="en-US"/>
           </a:p>
@@ -1058,7 +1063,7 @@
           <a:p>
             <a:fld id="{8264CF15-8E02-4BE3-8BED-2B7E53A4CE09}" type="datetimeFigureOut">
               <a:rPr lang="zh-CN" altLang="en-US" smtClean="0"/>
-              <a:t>2025/9/17</a:t>
+              <a:t>2025/9/18</a:t>
             </a:fld>
             <a:endParaRPr lang="zh-CN" altLang="en-US"/>
           </a:p>
@@ -1420,7 +1425,7 @@
           <a:p>
             <a:fld id="{8264CF15-8E02-4BE3-8BED-2B7E53A4CE09}" type="datetimeFigureOut">
               <a:rPr lang="zh-CN" altLang="en-US" smtClean="0"/>
-              <a:t>2025/9/17</a:t>
+              <a:t>2025/9/18</a:t>
             </a:fld>
             <a:endParaRPr lang="zh-CN" altLang="en-US"/>
           </a:p>
@@ -1731,7 +1736,7 @@
           <a:p>
             <a:fld id="{7B6AF446-C7A3-4A2D-B01C-4080BC0DDC51}" type="datetime1">
               <a:rPr lang="en-US" smtClean="0"/>
-              <a:t>9/17/2025</a:t>
+              <a:t>9/18/2025</a:t>
             </a:fld>
             <a:endParaRPr lang="en-US"/>
           </a:p>
@@ -1930,7 +1935,7 @@
           <a:p>
             <a:fld id="{E77A5B41-BFC4-4275-B283-99B49DA65AE7}" type="datetime1">
               <a:rPr lang="en-US" smtClean="0"/>
-              <a:t>9/17/2025</a:t>
+              <a:t>9/18/2025</a:t>
             </a:fld>
             <a:endParaRPr lang="en-US"/>
           </a:p>
@@ -2243,7 +2248,7 @@
           <a:p>
             <a:fld id="{FC9F5041-7C46-4557-A8EF-D9C07452E04F}" type="datetime1">
               <a:rPr lang="en-US" smtClean="0"/>
-              <a:t>9/17/2025</a:t>
+              <a:t>9/18/2025</a:t>
             </a:fld>
             <a:endParaRPr lang="en-US"/>
           </a:p>
@@ -2497,7 +2502,7 @@
           <a:p>
             <a:fld id="{9165F29B-8031-46B1-B8C6-0E15991220BD}" type="datetime1">
               <a:rPr lang="en-US" smtClean="0"/>
-              <a:t>9/17/2025</a:t>
+              <a:t>9/18/2025</a:t>
             </a:fld>
             <a:endParaRPr lang="en-US"/>
           </a:p>
@@ -2920,7 +2925,7 @@
           <a:p>
             <a:fld id="{EA26BC96-89B3-4A8F-8C3A-8FECB7F0AF50}" type="datetime1">
               <a:rPr lang="en-US" smtClean="0"/>
-              <a:t>9/17/2025</a:t>
+              <a:t>9/18/2025</a:t>
             </a:fld>
             <a:endParaRPr lang="en-US"/>
           </a:p>
@@ -3044,7 +3049,7 @@
           <a:p>
             <a:fld id="{979F6BEE-F3E4-4F76-B56D-1C48BBD7AEA9}" type="datetime1">
               <a:rPr lang="en-US" smtClean="0"/>
-              <a:t>9/17/2025</a:t>
+              <a:t>9/18/2025</a:t>
             </a:fld>
             <a:endParaRPr lang="en-US"/>
           </a:p>
@@ -3140,7 +3145,7 @@
           <a:p>
             <a:fld id="{5EBF79E3-AE5C-4717-978E-15FC3620ACEF}" type="datetime1">
               <a:rPr lang="en-US" smtClean="0"/>
-              <a:t>9/17/2025</a:t>
+              <a:t>9/18/2025</a:t>
             </a:fld>
             <a:endParaRPr lang="en-US"/>
           </a:p>
@@ -3518,7 +3523,7 @@
           <a:p>
             <a:fld id="{07B82B69-02FF-4A00-BF94-063310C8EF70}" type="datetime1">
               <a:rPr lang="en-US" smtClean="0"/>
-              <a:t>9/17/2025</a:t>
+              <a:t>9/18/2025</a:t>
             </a:fld>
             <a:endParaRPr lang="en-US"/>
           </a:p>
@@ -3727,7 +3732,7 @@
           <a:p>
             <a:fld id="{8264CF15-8E02-4BE3-8BED-2B7E53A4CE09}" type="datetimeFigureOut">
               <a:rPr lang="zh-CN" altLang="en-US" smtClean="0"/>
-              <a:t>2025/9/17</a:t>
+              <a:t>2025/9/18</a:t>
             </a:fld>
             <a:endParaRPr lang="zh-CN" altLang="en-US"/>
           </a:p>
@@ -4009,7 +4014,7 @@
           <a:p>
             <a:fld id="{8C7A3C19-50BF-43F6-AD63-C05469BE5035}" type="datetime1">
               <a:rPr lang="en-US" smtClean="0"/>
-              <a:t>9/17/2025</a:t>
+              <a:t>9/18/2025</a:t>
             </a:fld>
             <a:endParaRPr lang="en-US"/>
           </a:p>
@@ -4201,7 +4206,7 @@
           <a:p>
             <a:fld id="{FED35F4A-7979-4619-A182-7748F9FBAA45}" type="datetime1">
               <a:rPr lang="en-US" smtClean="0"/>
-              <a:t>9/17/2025</a:t>
+              <a:t>9/18/2025</a:t>
             </a:fld>
             <a:endParaRPr lang="en-US"/>
           </a:p>
@@ -4564,7 +4569,7 @@
           <a:p>
             <a:fld id="{4E8A0E10-3CDB-43FE-B1B5-7D3654751138}" type="datetime1">
               <a:rPr lang="en-US" smtClean="0"/>
-              <a:t>9/17/2025</a:t>
+              <a:t>9/18/2025</a:t>
             </a:fld>
             <a:endParaRPr lang="en-US"/>
           </a:p>
@@ -4876,7 +4881,7 @@
           <a:p>
             <a:fld id="{C6B0FEA4-C6CA-4262-94C7-989766AA3A47}" type="datetime1">
               <a:rPr lang="en-US" smtClean="0"/>
-              <a:t>9/17/2025</a:t>
+              <a:t>9/18/2025</a:t>
             </a:fld>
             <a:endParaRPr lang="en-US"/>
           </a:p>
@@ -5075,7 +5080,7 @@
           <a:p>
             <a:fld id="{6F65A5F7-BE7B-4360-B821-FCDB8E9197AC}" type="datetime1">
               <a:rPr lang="en-US" smtClean="0"/>
-              <a:t>9/17/2025</a:t>
+              <a:t>9/18/2025</a:t>
             </a:fld>
             <a:endParaRPr lang="en-US"/>
           </a:p>
@@ -5388,7 +5393,7 @@
           <a:p>
             <a:fld id="{6145D492-0F60-495A-BAAC-3C877C1D64A2}" type="datetime1">
               <a:rPr lang="en-US" smtClean="0"/>
-              <a:t>9/17/2025</a:t>
+              <a:t>9/18/2025</a:t>
             </a:fld>
             <a:endParaRPr lang="en-US"/>
           </a:p>
@@ -5642,7 +5647,7 @@
           <a:p>
             <a:fld id="{4A322FED-C97B-4E3C-B05B-1278829CCA0F}" type="datetime1">
               <a:rPr lang="en-US" smtClean="0"/>
-              <a:t>9/17/2025</a:t>
+              <a:t>9/18/2025</a:t>
             </a:fld>
             <a:endParaRPr lang="en-US"/>
           </a:p>
@@ -6065,7 +6070,7 @@
           <a:p>
             <a:fld id="{1BBF91E7-DD27-45EE-9FAC-A58839C2E3FB}" type="datetime1">
               <a:rPr lang="en-US" smtClean="0"/>
-              <a:t>9/17/2025</a:t>
+              <a:t>9/18/2025</a:t>
             </a:fld>
             <a:endParaRPr lang="en-US"/>
           </a:p>
@@ -6189,7 +6194,7 @@
           <a:p>
             <a:fld id="{470DB943-D34E-498D-BB5B-1BC0D01A4C3C}" type="datetime1">
               <a:rPr lang="en-US" smtClean="0"/>
-              <a:t>9/17/2025</a:t>
+              <a:t>9/18/2025</a:t>
             </a:fld>
             <a:endParaRPr lang="en-US"/>
           </a:p>
@@ -6285,7 +6290,7 @@
           <a:p>
             <a:fld id="{0EF88AC7-A362-47DE-B037-3A7E785BA73D}" type="datetime1">
               <a:rPr lang="en-US" smtClean="0"/>
-              <a:t>9/17/2025</a:t>
+              <a:t>9/18/2025</a:t>
             </a:fld>
             <a:endParaRPr lang="en-US"/>
           </a:p>
@@ -6586,7 +6591,7 @@
           <a:p>
             <a:fld id="{8264CF15-8E02-4BE3-8BED-2B7E53A4CE09}" type="datetimeFigureOut">
               <a:rPr lang="zh-CN" altLang="en-US" smtClean="0"/>
-              <a:t>2025/9/17</a:t>
+              <a:t>2025/9/18</a:t>
             </a:fld>
             <a:endParaRPr lang="zh-CN" altLang="en-US"/>
           </a:p>
@@ -6975,7 +6980,7 @@
           <a:p>
             <a:fld id="{1E09BAED-B7FC-4220-8037-60663F890984}" type="datetime1">
               <a:rPr lang="en-US" smtClean="0"/>
-              <a:t>9/17/2025</a:t>
+              <a:t>9/18/2025</a:t>
             </a:fld>
             <a:endParaRPr lang="en-US"/>
           </a:p>
@@ -7268,7 +7273,7 @@
           <a:p>
             <a:fld id="{BB3C0B96-D43B-410F-A514-3967CACDF6C4}" type="datetime1">
               <a:rPr lang="en-US" smtClean="0"/>
-              <a:t>9/17/2025</a:t>
+              <a:t>9/18/2025</a:t>
             </a:fld>
             <a:endParaRPr lang="en-US"/>
           </a:p>
@@ -7460,7 +7465,7 @@
           <a:p>
             <a:fld id="{C63DFB46-027F-4778-8182-714012A6E051}" type="datetime1">
               <a:rPr lang="en-US" smtClean="0"/>
-              <a:t>9/17/2025</a:t>
+              <a:t>9/18/2025</a:t>
             </a:fld>
             <a:endParaRPr lang="en-US"/>
           </a:p>
@@ -7823,7 +7828,7 @@
           <a:p>
             <a:fld id="{770FD05A-9631-4BEE-9AA4-5575ADA850E9}" type="datetime1">
               <a:rPr lang="en-US" smtClean="0"/>
-              <a:t>9/17/2025</a:t>
+              <a:t>9/18/2025</a:t>
             </a:fld>
             <a:endParaRPr lang="en-US"/>
           </a:p>
@@ -8135,7 +8140,7 @@
           <a:p>
             <a:fld id="{ED291B17-9318-49DB-B28B-6E5994AE9581}" type="datetime1">
               <a:rPr lang="en-US" smtClean="0"/>
-              <a:t>9/17/2025</a:t>
+              <a:t>9/18/2025</a:t>
             </a:fld>
             <a:endParaRPr lang="en-US" dirty="0"/>
           </a:p>
@@ -8333,7 +8338,7 @@
           <a:p>
             <a:fld id="{78DD82B9-B8EE-4375-B6FF-88FA6ABB15D9}" type="datetime1">
               <a:rPr lang="en-US" smtClean="0"/>
-              <a:t>9/17/2025</a:t>
+              <a:t>9/18/2025</a:t>
             </a:fld>
             <a:endParaRPr lang="en-US" dirty="0"/>
           </a:p>
@@ -8645,7 +8650,7 @@
           <a:p>
             <a:fld id="{B2497495-0637-405E-AE64-5CC7506D51F5}" type="datetime1">
               <a:rPr lang="en-US" smtClean="0"/>
-              <a:t>9/17/2025</a:t>
+              <a:t>9/18/2025</a:t>
             </a:fld>
             <a:endParaRPr lang="en-US" dirty="0"/>
           </a:p>
@@ -8898,7 +8903,7 @@
           <a:p>
             <a:fld id="{7BFFD690-9426-415D-8B65-26881E07B2D4}" type="datetime1">
               <a:rPr lang="en-US" smtClean="0"/>
-              <a:t>9/17/2025</a:t>
+              <a:t>9/18/2025</a:t>
             </a:fld>
             <a:endParaRPr lang="en-US" dirty="0"/>
           </a:p>
@@ -9320,7 +9325,7 @@
           <a:p>
             <a:fld id="{04C4989A-474C-40DE-95B9-011C28B71673}" type="datetime1">
               <a:rPr lang="en-US" smtClean="0"/>
-              <a:t>9/17/2025</a:t>
+              <a:t>9/18/2025</a:t>
             </a:fld>
             <a:endParaRPr lang="en-US" dirty="0"/>
           </a:p>
@@ -9443,7 +9448,7 @@
           <a:p>
             <a:fld id="{5DB4ED54-5B5E-4A04-93D3-5772E3CE3818}" type="datetime1">
               <a:rPr lang="en-US" smtClean="0"/>
-              <a:t>9/17/2025</a:t>
+              <a:t>9/18/2025</a:t>
             </a:fld>
             <a:endParaRPr lang="en-US" dirty="0"/>
           </a:p>
@@ -9684,7 +9689,7 @@
           <a:p>
             <a:fld id="{8264CF15-8E02-4BE3-8BED-2B7E53A4CE09}" type="datetimeFigureOut">
               <a:rPr lang="zh-CN" altLang="en-US" smtClean="0"/>
-              <a:t>2025/9/17</a:t>
+              <a:t>2025/9/18</a:t>
             </a:fld>
             <a:endParaRPr lang="zh-CN" altLang="en-US"/>
           </a:p>
@@ -9779,7 +9784,7 @@
           <a:p>
             <a:fld id="{4EDE50D6-574B-40AF-946F-D52A04ADE379}" type="datetime1">
               <a:rPr lang="en-US" smtClean="0"/>
-              <a:t>9/17/2025</a:t>
+              <a:t>9/18/2025</a:t>
             </a:fld>
             <a:endParaRPr lang="en-US" dirty="0"/>
           </a:p>
@@ -10156,7 +10161,7 @@
           <a:p>
             <a:fld id="{D82884F1-FFEA-405F-9602-3DCA865EDA4E}" type="datetime1">
               <a:rPr lang="en-US" smtClean="0"/>
-              <a:t>9/17/2025</a:t>
+              <a:t>9/18/2025</a:t>
             </a:fld>
             <a:endParaRPr lang="en-US" dirty="0"/>
           </a:p>
@@ -10449,7 +10454,7 @@
           <a:p>
             <a:fld id="{7E18DB4A-8810-4A10-AD5C-D5E2C667F5B3}" type="datetime1">
               <a:rPr lang="en-US" smtClean="0"/>
-              <a:t>9/17/2025</a:t>
+              <a:t>9/18/2025</a:t>
             </a:fld>
             <a:endParaRPr lang="en-US" dirty="0"/>
           </a:p>
@@ -10641,7 +10646,7 @@
           <a:p>
             <a:fld id="{2CED4963-E985-44C4-B8C4-FDD613B7C2F8}" type="datetime1">
               <a:rPr lang="en-US" smtClean="0"/>
-              <a:t>9/17/2025</a:t>
+              <a:t>9/18/2025</a:t>
             </a:fld>
             <a:endParaRPr lang="en-US" dirty="0"/>
           </a:p>
@@ -11003,7 +11008,7 @@
           <a:p>
             <a:fld id="{ED291B17-9318-49DB-B28B-6E5994AE9581}" type="datetime1">
               <a:rPr lang="en-US" smtClean="0"/>
-              <a:t>9/17/2025</a:t>
+              <a:t>9/18/2025</a:t>
             </a:fld>
             <a:endParaRPr lang="en-US" dirty="0"/>
           </a:p>
@@ -11483,7 +11488,7 @@
           <a:p>
             <a:fld id="{ED291B17-9318-49DB-B28B-6E5994AE9581}" type="datetime1">
               <a:rPr lang="en-US" smtClean="0"/>
-              <a:t>9/17/2025</a:t>
+              <a:t>9/18/2025</a:t>
             </a:fld>
             <a:endParaRPr lang="en-US" dirty="0"/>
           </a:p>
@@ -11681,7 +11686,7 @@
           <a:p>
             <a:fld id="{78DD82B9-B8EE-4375-B6FF-88FA6ABB15D9}" type="datetime1">
               <a:rPr lang="en-US" smtClean="0"/>
-              <a:t>9/17/2025</a:t>
+              <a:t>9/18/2025</a:t>
             </a:fld>
             <a:endParaRPr lang="en-US" dirty="0"/>
           </a:p>
@@ -11993,7 +11998,7 @@
           <a:p>
             <a:fld id="{B2497495-0637-405E-AE64-5CC7506D51F5}" type="datetime1">
               <a:rPr lang="en-US" smtClean="0"/>
-              <a:t>9/17/2025</a:t>
+              <a:t>9/18/2025</a:t>
             </a:fld>
             <a:endParaRPr lang="en-US" dirty="0"/>
           </a:p>
@@ -12246,7 +12251,7 @@
           <a:p>
             <a:fld id="{7BFFD690-9426-415D-8B65-26881E07B2D4}" type="datetime1">
               <a:rPr lang="en-US" smtClean="0"/>
-              <a:t>9/17/2025</a:t>
+              <a:t>9/18/2025</a:t>
             </a:fld>
             <a:endParaRPr lang="en-US" dirty="0"/>
           </a:p>
@@ -12668,7 +12673,7 @@
           <a:p>
             <a:fld id="{8264CF15-8E02-4BE3-8BED-2B7E53A4CE09}" type="datetimeFigureOut">
               <a:rPr lang="zh-CN" altLang="en-US" smtClean="0"/>
-              <a:t>2025/9/17</a:t>
+              <a:t>2025/9/18</a:t>
             </a:fld>
             <a:endParaRPr lang="zh-CN" altLang="en-US"/>
           </a:p>
@@ -13090,7 +13095,7 @@
           <a:p>
             <a:fld id="{04C4989A-474C-40DE-95B9-011C28B71673}" type="datetime1">
               <a:rPr lang="en-US" smtClean="0"/>
-              <a:t>9/17/2025</a:t>
+              <a:t>9/18/2025</a:t>
             </a:fld>
             <a:endParaRPr lang="en-US" dirty="0"/>
           </a:p>
@@ -13213,7 +13218,7 @@
           <a:p>
             <a:fld id="{5DB4ED54-5B5E-4A04-93D3-5772E3CE3818}" type="datetime1">
               <a:rPr lang="en-US" smtClean="0"/>
-              <a:t>9/17/2025</a:t>
+              <a:t>9/18/2025</a:t>
             </a:fld>
             <a:endParaRPr lang="en-US" dirty="0"/>
           </a:p>
@@ -13308,7 +13313,7 @@
           <a:p>
             <a:fld id="{4EDE50D6-574B-40AF-946F-D52A04ADE379}" type="datetime1">
               <a:rPr lang="en-US" smtClean="0"/>
-              <a:t>9/17/2025</a:t>
+              <a:t>9/18/2025</a:t>
             </a:fld>
             <a:endParaRPr lang="en-US" dirty="0"/>
           </a:p>
@@ -13685,7 +13690,7 @@
           <a:p>
             <a:fld id="{D82884F1-FFEA-405F-9602-3DCA865EDA4E}" type="datetime1">
               <a:rPr lang="en-US" smtClean="0"/>
-              <a:t>9/17/2025</a:t>
+              <a:t>9/18/2025</a:t>
             </a:fld>
             <a:endParaRPr lang="en-US" dirty="0"/>
           </a:p>
@@ -13978,7 +13983,7 @@
           <a:p>
             <a:fld id="{7E18DB4A-8810-4A10-AD5C-D5E2C667F5B3}" type="datetime1">
               <a:rPr lang="en-US" smtClean="0"/>
-              <a:t>9/17/2025</a:t>
+              <a:t>9/18/2025</a:t>
             </a:fld>
             <a:endParaRPr lang="en-US" dirty="0"/>
           </a:p>
@@ -14170,7 +14175,7 @@
           <a:p>
             <a:fld id="{2CED4963-E985-44C4-B8C4-FDD613B7C2F8}" type="datetime1">
               <a:rPr lang="en-US" smtClean="0"/>
-              <a:t>9/17/2025</a:t>
+              <a:t>9/18/2025</a:t>
             </a:fld>
             <a:endParaRPr lang="en-US" dirty="0"/>
           </a:p>
@@ -14532,7 +14537,7 @@
           <a:p>
             <a:fld id="{ED291B17-9318-49DB-B28B-6E5994AE9581}" type="datetime1">
               <a:rPr lang="en-US" smtClean="0"/>
-              <a:t>9/17/2025</a:t>
+              <a:t>9/18/2025</a:t>
             </a:fld>
             <a:endParaRPr lang="en-US" dirty="0"/>
           </a:p>
@@ -15012,7 +15017,7 @@
           <a:p>
             <a:fld id="{ED291B17-9318-49DB-B28B-6E5994AE9581}" type="datetime1">
               <a:rPr lang="en-US" smtClean="0"/>
-              <a:t>9/17/2025</a:t>
+              <a:t>9/18/2025</a:t>
             </a:fld>
             <a:endParaRPr lang="en-US" dirty="0"/>
           </a:p>
@@ -15208,7 +15213,7 @@
           <a:p>
             <a:fld id="{78DD82B9-B8EE-4375-B6FF-88FA6ABB15D9}" type="datetime1">
               <a:rPr lang="en-US" smtClean="0"/>
-              <a:t>9/17/2025</a:t>
+              <a:t>9/18/2025</a:t>
             </a:fld>
             <a:endParaRPr lang="en-US" dirty="0"/>
           </a:p>
@@ -15343,7 +15348,7 @@
           <a:p>
             <a:fld id="{8264CF15-8E02-4BE3-8BED-2B7E53A4CE09}" type="datetimeFigureOut">
               <a:rPr lang="zh-CN" altLang="en-US" smtClean="0"/>
-              <a:t>2025/9/17</a:t>
+              <a:t>2025/9/18</a:t>
             </a:fld>
             <a:endParaRPr lang="zh-CN" altLang="en-US"/>
           </a:p>
@@ -15642,7 +15647,7 @@
           <a:p>
             <a:fld id="{B2497495-0637-405E-AE64-5CC7506D51F5}" type="datetime1">
               <a:rPr lang="en-US" smtClean="0"/>
-              <a:t>9/17/2025</a:t>
+              <a:t>9/18/2025</a:t>
             </a:fld>
             <a:endParaRPr lang="en-US" dirty="0"/>
           </a:p>
@@ -15893,7 +15898,7 @@
           <a:p>
             <a:fld id="{7BFFD690-9426-415D-8B65-26881E07B2D4}" type="datetime1">
               <a:rPr lang="en-US" smtClean="0"/>
-              <a:t>9/17/2025</a:t>
+              <a:t>9/18/2025</a:t>
             </a:fld>
             <a:endParaRPr lang="en-US" dirty="0"/>
           </a:p>
@@ -16313,7 +16318,7 @@
           <a:p>
             <a:fld id="{04C4989A-474C-40DE-95B9-011C28B71673}" type="datetime1">
               <a:rPr lang="en-US" smtClean="0"/>
-              <a:t>9/17/2025</a:t>
+              <a:t>9/18/2025</a:t>
             </a:fld>
             <a:endParaRPr lang="en-US" dirty="0"/>
           </a:p>
@@ -16436,7 +16441,7 @@
           <a:p>
             <a:fld id="{5DB4ED54-5B5E-4A04-93D3-5772E3CE3818}" type="datetime1">
               <a:rPr lang="en-US" smtClean="0"/>
-              <a:t>9/17/2025</a:t>
+              <a:t>9/18/2025</a:t>
             </a:fld>
             <a:endParaRPr lang="en-US" dirty="0"/>
           </a:p>
@@ -16531,7 +16536,7 @@
           <a:p>
             <a:fld id="{4EDE50D6-574B-40AF-946F-D52A04ADE379}" type="datetime1">
               <a:rPr lang="en-US" smtClean="0"/>
-              <a:t>9/17/2025</a:t>
+              <a:t>9/18/2025</a:t>
             </a:fld>
             <a:endParaRPr lang="en-US" dirty="0"/>
           </a:p>
@@ -16907,7 +16912,7 @@
           <a:p>
             <a:fld id="{D82884F1-FFEA-405F-9602-3DCA865EDA4E}" type="datetime1">
               <a:rPr lang="en-US" smtClean="0"/>
-              <a:t>9/17/2025</a:t>
+              <a:t>9/18/2025</a:t>
             </a:fld>
             <a:endParaRPr lang="en-US" dirty="0"/>
           </a:p>
@@ -17200,7 +17205,7 @@
           <a:p>
             <a:fld id="{7E18DB4A-8810-4A10-AD5C-D5E2C667F5B3}" type="datetime1">
               <a:rPr lang="en-US" smtClean="0"/>
-              <a:t>9/17/2025</a:t>
+              <a:t>9/18/2025</a:t>
             </a:fld>
             <a:endParaRPr lang="en-US" dirty="0"/>
           </a:p>
@@ -17392,7 +17397,7 @@
           <a:p>
             <a:fld id="{2CED4963-E985-44C4-B8C4-FDD613B7C2F8}" type="datetime1">
               <a:rPr lang="en-US" smtClean="0"/>
-              <a:t>9/17/2025</a:t>
+              <a:t>9/18/2025</a:t>
             </a:fld>
             <a:endParaRPr lang="en-US" dirty="0"/>
           </a:p>
@@ -17754,7 +17759,7 @@
           <a:p>
             <a:fld id="{ED291B17-9318-49DB-B28B-6E5994AE9581}" type="datetime1">
               <a:rPr lang="en-US" smtClean="0"/>
-              <a:t>9/17/2025</a:t>
+              <a:t>9/18/2025</a:t>
             </a:fld>
             <a:endParaRPr lang="en-US" dirty="0"/>
           </a:p>
@@ -18065,7 +18070,7 @@
           <a:p>
             <a:fld id="{ED291B17-9318-49DB-B28B-6E5994AE9581}" type="datetime1">
               <a:rPr lang="en-US" smtClean="0"/>
-              <a:t>9/17/2025</a:t>
+              <a:t>9/18/2025</a:t>
             </a:fld>
             <a:endParaRPr lang="en-US" dirty="0"/>
           </a:p>
@@ -18172,7 +18177,7 @@
           <a:p>
             <a:fld id="{8264CF15-8E02-4BE3-8BED-2B7E53A4CE09}" type="datetimeFigureOut">
               <a:rPr lang="zh-CN" altLang="en-US" smtClean="0"/>
-              <a:t>2025/9/17</a:t>
+              <a:t>2025/9/18</a:t>
             </a:fld>
             <a:endParaRPr lang="zh-CN" altLang="en-US"/>
           </a:p>
@@ -18358,7 +18363,7 @@
           <a:p>
             <a:fld id="{78DD82B9-B8EE-4375-B6FF-88FA6ABB15D9}" type="datetime1">
               <a:rPr lang="en-US" smtClean="0"/>
-              <a:t>9/17/2025</a:t>
+              <a:t>9/18/2025</a:t>
             </a:fld>
             <a:endParaRPr lang="en-US" dirty="0"/>
           </a:p>
@@ -18670,7 +18675,7 @@
           <a:p>
             <a:fld id="{B2497495-0637-405E-AE64-5CC7506D51F5}" type="datetime1">
               <a:rPr lang="en-US" smtClean="0"/>
-              <a:t>9/17/2025</a:t>
+              <a:t>9/18/2025</a:t>
             </a:fld>
             <a:endParaRPr lang="en-US" dirty="0"/>
           </a:p>
@@ -18923,7 +18928,7 @@
           <a:p>
             <a:fld id="{7BFFD690-9426-415D-8B65-26881E07B2D4}" type="datetime1">
               <a:rPr lang="en-US" smtClean="0"/>
-              <a:t>9/17/2025</a:t>
+              <a:t>9/18/2025</a:t>
             </a:fld>
             <a:endParaRPr lang="en-US" dirty="0"/>
           </a:p>
@@ -19345,7 +19350,7 @@
           <a:p>
             <a:fld id="{04C4989A-474C-40DE-95B9-011C28B71673}" type="datetime1">
               <a:rPr lang="en-US" smtClean="0"/>
-              <a:t>9/17/2025</a:t>
+              <a:t>9/18/2025</a:t>
             </a:fld>
             <a:endParaRPr lang="en-US" dirty="0"/>
           </a:p>
@@ -19468,7 +19473,7 @@
           <a:p>
             <a:fld id="{5DB4ED54-5B5E-4A04-93D3-5772E3CE3818}" type="datetime1">
               <a:rPr lang="en-US" smtClean="0"/>
-              <a:t>9/17/2025</a:t>
+              <a:t>9/18/2025</a:t>
             </a:fld>
             <a:endParaRPr lang="en-US" dirty="0"/>
           </a:p>
@@ -19563,7 +19568,7 @@
           <a:p>
             <a:fld id="{4EDE50D6-574B-40AF-946F-D52A04ADE379}" type="datetime1">
               <a:rPr lang="en-US" smtClean="0"/>
-              <a:t>9/17/2025</a:t>
+              <a:t>9/18/2025</a:t>
             </a:fld>
             <a:endParaRPr lang="en-US" dirty="0"/>
           </a:p>
@@ -19940,7 +19945,7 @@
           <a:p>
             <a:fld id="{D82884F1-FFEA-405F-9602-3DCA865EDA4E}" type="datetime1">
               <a:rPr lang="en-US" smtClean="0"/>
-              <a:t>9/17/2025</a:t>
+              <a:t>9/18/2025</a:t>
             </a:fld>
             <a:endParaRPr lang="en-US" dirty="0"/>
           </a:p>
@@ -20233,7 +20238,7 @@
           <a:p>
             <a:fld id="{7E18DB4A-8810-4A10-AD5C-D5E2C667F5B3}" type="datetime1">
               <a:rPr lang="en-US" smtClean="0"/>
-              <a:t>9/17/2025</a:t>
+              <a:t>9/18/2025</a:t>
             </a:fld>
             <a:endParaRPr lang="en-US" dirty="0"/>
           </a:p>
@@ -20425,7 +20430,7 @@
           <a:p>
             <a:fld id="{2CED4963-E985-44C4-B8C4-FDD613B7C2F8}" type="datetime1">
               <a:rPr lang="en-US" smtClean="0"/>
-              <a:t>9/17/2025</a:t>
+              <a:t>9/18/2025</a:t>
             </a:fld>
             <a:endParaRPr lang="en-US" dirty="0"/>
           </a:p>
@@ -20787,7 +20792,7 @@
           <a:p>
             <a:fld id="{ED291B17-9318-49DB-B28B-6E5994AE9581}" type="datetime1">
               <a:rPr lang="en-US" smtClean="0"/>
-              <a:t>9/17/2025</a:t>
+              <a:t>9/18/2025</a:t>
             </a:fld>
             <a:endParaRPr lang="en-US" dirty="0"/>
           </a:p>
@@ -21176,7 +21181,7 @@
           <a:p>
             <a:fld id="{8264CF15-8E02-4BE3-8BED-2B7E53A4CE09}" type="datetimeFigureOut">
               <a:rPr lang="zh-CN" altLang="en-US" smtClean="0"/>
-              <a:t>2025/9/17</a:t>
+              <a:t>2025/9/18</a:t>
             </a:fld>
             <a:endParaRPr lang="zh-CN" altLang="en-US"/>
           </a:p>
@@ -21637,7 +21642,7 @@
           <a:p>
             <a:fld id="{8264CF15-8E02-4BE3-8BED-2B7E53A4CE09}" type="datetimeFigureOut">
               <a:rPr lang="zh-CN" altLang="en-US" smtClean="0"/>
-              <a:t>2025/9/17</a:t>
+              <a:t>2025/9/18</a:t>
             </a:fld>
             <a:endParaRPr lang="zh-CN" altLang="en-US"/>
           </a:p>
@@ -21851,7 +21856,7 @@
           <a:p>
             <a:fld id="{8264CF15-8E02-4BE3-8BED-2B7E53A4CE09}" type="datetimeFigureOut">
               <a:rPr lang="zh-CN" altLang="en-US" smtClean="0"/>
-              <a:t>2025/9/17</a:t>
+              <a:t>2025/9/18</a:t>
             </a:fld>
             <a:endParaRPr lang="zh-CN" altLang="en-US"/>
           </a:p>
@@ -22630,7 +22635,7 @@
           <a:p>
             <a:fld id="{61ED8BDC-014F-440E-B651-A3D5A758B980}" type="datetime1">
               <a:rPr lang="en-US" smtClean="0"/>
-              <a:t>9/17/2025</a:t>
+              <a:t>9/18/2025</a:t>
             </a:fld>
             <a:endParaRPr lang="en-US"/>
           </a:p>
@@ -23411,7 +23416,7 @@
           <a:p>
             <a:fld id="{8234BEC2-5A9D-42E1-9C16-1E9F257755B7}" type="datetime1">
               <a:rPr lang="en-US" smtClean="0"/>
-              <a:t>9/17/2025</a:t>
+              <a:t>9/18/2025</a:t>
             </a:fld>
             <a:endParaRPr lang="en-US"/>
           </a:p>
@@ -24192,7 +24197,7 @@
           <a:p>
             <a:fld id="{ED291B17-9318-49DB-B28B-6E5994AE9581}" type="datetime1">
               <a:rPr lang="en-US" smtClean="0"/>
-              <a:t>9/17/2025</a:t>
+              <a:t>9/18/2025</a:t>
             </a:fld>
             <a:endParaRPr lang="en-US" dirty="0"/>
           </a:p>
@@ -24973,7 +24978,7 @@
           <a:p>
             <a:fld id="{ED291B17-9318-49DB-B28B-6E5994AE9581}" type="datetime1">
               <a:rPr lang="en-US" smtClean="0"/>
-              <a:t>9/17/2025</a:t>
+              <a:t>9/18/2025</a:t>
             </a:fld>
             <a:endParaRPr lang="en-US" dirty="0"/>
           </a:p>
@@ -25754,7 +25759,7 @@
           <a:p>
             <a:fld id="{ED291B17-9318-49DB-B28B-6E5994AE9581}" type="datetime1">
               <a:rPr lang="en-US" smtClean="0"/>
-              <a:t>9/17/2025</a:t>
+              <a:t>9/18/2025</a:t>
             </a:fld>
             <a:endParaRPr lang="en-US" dirty="0"/>
           </a:p>
@@ -26534,7 +26539,7 @@
           <a:p>
             <a:fld id="{ED291B17-9318-49DB-B28B-6E5994AE9581}" type="datetime1">
               <a:rPr lang="en-US" smtClean="0"/>
-              <a:t>9/17/2025</a:t>
+              <a:t>9/18/2025</a:t>
             </a:fld>
             <a:endParaRPr lang="en-US" dirty="0"/>
           </a:p>
